--- a/粵語詩歌/除你以外(粵語).pptx
+++ b/粵語詩歌/除你以外(粵語).pptx
@@ -5,8 +5,12 @@
     <p:sldMasterId id="2147483672" r:id="rId1"/>
   </p:sldMasterIdLst>
   <p:sldIdLst>
-    <p:sldId id="257" r:id="rId2"/>
-    <p:sldId id="258" r:id="rId3"/>
+    <p:sldId id="391" r:id="rId2"/>
+    <p:sldId id="392" r:id="rId3"/>
+    <p:sldId id="393" r:id="rId4"/>
+    <p:sldId id="394" r:id="rId5"/>
+    <p:sldId id="395" r:id="rId6"/>
+    <p:sldId id="396" r:id="rId7"/>
   </p:sldIdLst>
   <p:sldSz cx="9144000" cy="5143500" type="screen16x9"/>
   <p:notesSz cx="6858000" cy="9144000"/>
@@ -105,6 +109,22 @@
       </a:defRPr>
     </a:lvl9pPr>
   </p:defaultTextStyle>
+  <p:extLst>
+    <p:ext uri="{EFAFB233-063F-42B5-8137-9DF3F51BA10A}">
+      <p15:sldGuideLst xmlns:p15="http://schemas.microsoft.com/office/powerpoint/2012/main">
+        <p15:guide id="1" orient="horz" pos="1620">
+          <p15:clr>
+            <a:srgbClr val="A4A3A4"/>
+          </p15:clr>
+        </p15:guide>
+        <p15:guide id="2" pos="2880">
+          <p15:clr>
+            <a:srgbClr val="A4A3A4"/>
+          </p15:clr>
+        </p15:guide>
+      </p15:sldGuideLst>
+    </p:ext>
+  </p:extLst>
 </p:presentation>
 </file>
 
@@ -146,10 +166,9 @@
           <a:lstStyle/>
           <a:p>
             <a:r>
-              <a:rPr lang="zh-TW" altLang="en-US" smtClean="0"/>
+              <a:rPr lang="zh-TW" altLang="en-US"/>
               <a:t>按一下以編輯母片標題樣式</a:t>
             </a:r>
-            <a:endParaRPr lang="zh-TW" altLang="en-US"/>
           </a:p>
         </p:txBody>
       </p:sp>
@@ -265,10 +284,9 @@
           </a:lstStyle>
           <a:p>
             <a:r>
-              <a:rPr lang="zh-TW" altLang="en-US" smtClean="0"/>
+              <a:rPr lang="zh-TW" altLang="en-US"/>
               <a:t>按一下以編輯母片副標題樣式</a:t>
             </a:r>
-            <a:endParaRPr lang="zh-TW" altLang="en-US"/>
           </a:p>
         </p:txBody>
       </p:sp>
@@ -290,7 +308,7 @@
             <a:fld id="{DB6A4473-6871-43EA-8769-892AAA22AF74}" type="datetimeFigureOut">
               <a:rPr lang="zh-TW" altLang="en-US" smtClean="0"/>
               <a:pPr/>
-              <a:t>2019/7/20</a:t>
+              <a:t>2025/8/24</a:t>
             </a:fld>
             <a:endParaRPr lang="zh-TW" altLang="en-US"/>
           </a:p>
@@ -380,10 +398,9 @@
           <a:lstStyle/>
           <a:p>
             <a:r>
-              <a:rPr lang="zh-TW" altLang="en-US" smtClean="0"/>
+              <a:rPr lang="zh-TW" altLang="en-US"/>
               <a:t>按一下以編輯母片標題樣式</a:t>
             </a:r>
-            <a:endParaRPr lang="zh-TW" altLang="en-US"/>
           </a:p>
         </p:txBody>
       </p:sp>
@@ -404,38 +421,37 @@
           <a:p>
             <a:pPr lvl="0"/>
             <a:r>
-              <a:rPr lang="zh-TW" altLang="en-US" smtClean="0"/>
+              <a:rPr lang="zh-TW" altLang="en-US"/>
               <a:t>按一下以編輯母片文字樣式</a:t>
             </a:r>
           </a:p>
           <a:p>
             <a:pPr lvl="1"/>
             <a:r>
-              <a:rPr lang="zh-TW" altLang="en-US" smtClean="0"/>
+              <a:rPr lang="zh-TW" altLang="en-US"/>
               <a:t>第二層</a:t>
             </a:r>
           </a:p>
           <a:p>
             <a:pPr lvl="2"/>
             <a:r>
-              <a:rPr lang="zh-TW" altLang="en-US" smtClean="0"/>
+              <a:rPr lang="zh-TW" altLang="en-US"/>
               <a:t>第三層</a:t>
             </a:r>
           </a:p>
           <a:p>
             <a:pPr lvl="3"/>
             <a:r>
-              <a:rPr lang="zh-TW" altLang="en-US" smtClean="0"/>
+              <a:rPr lang="zh-TW" altLang="en-US"/>
               <a:t>第四層</a:t>
             </a:r>
           </a:p>
           <a:p>
             <a:pPr lvl="4"/>
             <a:r>
-              <a:rPr lang="zh-TW" altLang="en-US" smtClean="0"/>
+              <a:rPr lang="zh-TW" altLang="en-US"/>
               <a:t>第五層</a:t>
             </a:r>
-            <a:endParaRPr lang="zh-TW" altLang="en-US"/>
           </a:p>
         </p:txBody>
       </p:sp>
@@ -457,7 +473,7 @@
             <a:fld id="{DB6A4473-6871-43EA-8769-892AAA22AF74}" type="datetimeFigureOut">
               <a:rPr lang="zh-TW" altLang="en-US" smtClean="0"/>
               <a:pPr/>
-              <a:t>2019/7/20</a:t>
+              <a:t>2025/8/24</a:t>
             </a:fld>
             <a:endParaRPr lang="zh-TW" altLang="en-US"/>
           </a:p>
@@ -552,10 +568,9 @@
           <a:lstStyle/>
           <a:p>
             <a:r>
-              <a:rPr lang="zh-TW" altLang="en-US" smtClean="0"/>
+              <a:rPr lang="zh-TW" altLang="en-US"/>
               <a:t>按一下以編輯母片標題樣式</a:t>
             </a:r>
-            <a:endParaRPr lang="zh-TW" altLang="en-US"/>
           </a:p>
         </p:txBody>
       </p:sp>
@@ -581,38 +596,37 @@
           <a:p>
             <a:pPr lvl="0"/>
             <a:r>
-              <a:rPr lang="zh-TW" altLang="en-US" smtClean="0"/>
+              <a:rPr lang="zh-TW" altLang="en-US"/>
               <a:t>按一下以編輯母片文字樣式</a:t>
             </a:r>
           </a:p>
           <a:p>
             <a:pPr lvl="1"/>
             <a:r>
-              <a:rPr lang="zh-TW" altLang="en-US" smtClean="0"/>
+              <a:rPr lang="zh-TW" altLang="en-US"/>
               <a:t>第二層</a:t>
             </a:r>
           </a:p>
           <a:p>
             <a:pPr lvl="2"/>
             <a:r>
-              <a:rPr lang="zh-TW" altLang="en-US" smtClean="0"/>
+              <a:rPr lang="zh-TW" altLang="en-US"/>
               <a:t>第三層</a:t>
             </a:r>
           </a:p>
           <a:p>
             <a:pPr lvl="3"/>
             <a:r>
-              <a:rPr lang="zh-TW" altLang="en-US" smtClean="0"/>
+              <a:rPr lang="zh-TW" altLang="en-US"/>
               <a:t>第四層</a:t>
             </a:r>
           </a:p>
           <a:p>
             <a:pPr lvl="4"/>
             <a:r>
-              <a:rPr lang="zh-TW" altLang="en-US" smtClean="0"/>
+              <a:rPr lang="zh-TW" altLang="en-US"/>
               <a:t>第五層</a:t>
             </a:r>
-            <a:endParaRPr lang="zh-TW" altLang="en-US"/>
           </a:p>
         </p:txBody>
       </p:sp>
@@ -634,7 +648,7 @@
             <a:fld id="{DB6A4473-6871-43EA-8769-892AAA22AF74}" type="datetimeFigureOut">
               <a:rPr lang="zh-TW" altLang="en-US" smtClean="0"/>
               <a:pPr/>
-              <a:t>2019/7/20</a:t>
+              <a:t>2025/8/24</a:t>
             </a:fld>
             <a:endParaRPr lang="zh-TW" altLang="en-US"/>
           </a:p>
@@ -724,10 +738,9 @@
           <a:lstStyle/>
           <a:p>
             <a:r>
-              <a:rPr lang="zh-TW" altLang="en-US" smtClean="0"/>
+              <a:rPr lang="zh-TW" altLang="en-US"/>
               <a:t>按一下以編輯母片標題樣式</a:t>
             </a:r>
-            <a:endParaRPr lang="zh-TW" altLang="en-US"/>
           </a:p>
         </p:txBody>
       </p:sp>
@@ -748,38 +761,37 @@
           <a:p>
             <a:pPr lvl="0"/>
             <a:r>
-              <a:rPr lang="zh-TW" altLang="en-US" smtClean="0"/>
+              <a:rPr lang="zh-TW" altLang="en-US"/>
               <a:t>按一下以編輯母片文字樣式</a:t>
             </a:r>
           </a:p>
           <a:p>
             <a:pPr lvl="1"/>
             <a:r>
-              <a:rPr lang="zh-TW" altLang="en-US" smtClean="0"/>
+              <a:rPr lang="zh-TW" altLang="en-US"/>
               <a:t>第二層</a:t>
             </a:r>
           </a:p>
           <a:p>
             <a:pPr lvl="2"/>
             <a:r>
-              <a:rPr lang="zh-TW" altLang="en-US" smtClean="0"/>
+              <a:rPr lang="zh-TW" altLang="en-US"/>
               <a:t>第三層</a:t>
             </a:r>
           </a:p>
           <a:p>
             <a:pPr lvl="3"/>
             <a:r>
-              <a:rPr lang="zh-TW" altLang="en-US" smtClean="0"/>
+              <a:rPr lang="zh-TW" altLang="en-US"/>
               <a:t>第四層</a:t>
             </a:r>
           </a:p>
           <a:p>
             <a:pPr lvl="4"/>
             <a:r>
-              <a:rPr lang="zh-TW" altLang="en-US" smtClean="0"/>
+              <a:rPr lang="zh-TW" altLang="en-US"/>
               <a:t>第五層</a:t>
             </a:r>
-            <a:endParaRPr lang="zh-TW" altLang="en-US"/>
           </a:p>
         </p:txBody>
       </p:sp>
@@ -801,7 +813,7 @@
             <a:fld id="{DB6A4473-6871-43EA-8769-892AAA22AF74}" type="datetimeFigureOut">
               <a:rPr lang="zh-TW" altLang="en-US" smtClean="0"/>
               <a:pPr/>
-              <a:t>2019/7/20</a:t>
+              <a:t>2025/8/24</a:t>
             </a:fld>
             <a:endParaRPr lang="zh-TW" altLang="en-US"/>
           </a:p>
@@ -900,10 +912,9 @@
           </a:lstStyle>
           <a:p>
             <a:r>
-              <a:rPr lang="zh-TW" altLang="en-US" smtClean="0"/>
+              <a:rPr lang="zh-TW" altLang="en-US"/>
               <a:t>按一下以編輯母片標題樣式</a:t>
             </a:r>
-            <a:endParaRPr lang="zh-TW" altLang="en-US"/>
           </a:p>
         </p:txBody>
       </p:sp>
@@ -1020,7 +1031,7 @@
           <a:p>
             <a:pPr lvl="0"/>
             <a:r>
-              <a:rPr lang="zh-TW" altLang="en-US" smtClean="0"/>
+              <a:rPr lang="zh-TW" altLang="en-US"/>
               <a:t>按一下以編輯母片文字樣式</a:t>
             </a:r>
           </a:p>
@@ -1044,7 +1055,7 @@
             <a:fld id="{DB6A4473-6871-43EA-8769-892AAA22AF74}" type="datetimeFigureOut">
               <a:rPr lang="zh-TW" altLang="en-US" smtClean="0"/>
               <a:pPr/>
-              <a:t>2019/7/20</a:t>
+              <a:t>2025/8/24</a:t>
             </a:fld>
             <a:endParaRPr lang="zh-TW" altLang="en-US"/>
           </a:p>
@@ -1134,10 +1145,9 @@
           <a:lstStyle/>
           <a:p>
             <a:r>
-              <a:rPr lang="zh-TW" altLang="en-US" smtClean="0"/>
+              <a:rPr lang="zh-TW" altLang="en-US"/>
               <a:t>按一下以編輯母片標題樣式</a:t>
             </a:r>
-            <a:endParaRPr lang="zh-TW" altLang="en-US"/>
           </a:p>
         </p:txBody>
       </p:sp>
@@ -1191,38 +1201,37 @@
           <a:p>
             <a:pPr lvl="0"/>
             <a:r>
-              <a:rPr lang="zh-TW" altLang="en-US" smtClean="0"/>
+              <a:rPr lang="zh-TW" altLang="en-US"/>
               <a:t>按一下以編輯母片文字樣式</a:t>
             </a:r>
           </a:p>
           <a:p>
             <a:pPr lvl="1"/>
             <a:r>
-              <a:rPr lang="zh-TW" altLang="en-US" smtClean="0"/>
+              <a:rPr lang="zh-TW" altLang="en-US"/>
               <a:t>第二層</a:t>
             </a:r>
           </a:p>
           <a:p>
             <a:pPr lvl="2"/>
             <a:r>
-              <a:rPr lang="zh-TW" altLang="en-US" smtClean="0"/>
+              <a:rPr lang="zh-TW" altLang="en-US"/>
               <a:t>第三層</a:t>
             </a:r>
           </a:p>
           <a:p>
             <a:pPr lvl="3"/>
             <a:r>
-              <a:rPr lang="zh-TW" altLang="en-US" smtClean="0"/>
+              <a:rPr lang="zh-TW" altLang="en-US"/>
               <a:t>第四層</a:t>
             </a:r>
           </a:p>
           <a:p>
             <a:pPr lvl="4"/>
             <a:r>
-              <a:rPr lang="zh-TW" altLang="en-US" smtClean="0"/>
+              <a:rPr lang="zh-TW" altLang="en-US"/>
               <a:t>第五層</a:t>
             </a:r>
-            <a:endParaRPr lang="zh-TW" altLang="en-US"/>
           </a:p>
         </p:txBody>
       </p:sp>
@@ -1276,38 +1285,37 @@
           <a:p>
             <a:pPr lvl="0"/>
             <a:r>
-              <a:rPr lang="zh-TW" altLang="en-US" smtClean="0"/>
+              <a:rPr lang="zh-TW" altLang="en-US"/>
               <a:t>按一下以編輯母片文字樣式</a:t>
             </a:r>
           </a:p>
           <a:p>
             <a:pPr lvl="1"/>
             <a:r>
-              <a:rPr lang="zh-TW" altLang="en-US" smtClean="0"/>
+              <a:rPr lang="zh-TW" altLang="en-US"/>
               <a:t>第二層</a:t>
             </a:r>
           </a:p>
           <a:p>
             <a:pPr lvl="2"/>
             <a:r>
-              <a:rPr lang="zh-TW" altLang="en-US" smtClean="0"/>
+              <a:rPr lang="zh-TW" altLang="en-US"/>
               <a:t>第三層</a:t>
             </a:r>
           </a:p>
           <a:p>
             <a:pPr lvl="3"/>
             <a:r>
-              <a:rPr lang="zh-TW" altLang="en-US" smtClean="0"/>
+              <a:rPr lang="zh-TW" altLang="en-US"/>
               <a:t>第四層</a:t>
             </a:r>
           </a:p>
           <a:p>
             <a:pPr lvl="4"/>
             <a:r>
-              <a:rPr lang="zh-TW" altLang="en-US" smtClean="0"/>
+              <a:rPr lang="zh-TW" altLang="en-US"/>
               <a:t>第五層</a:t>
             </a:r>
-            <a:endParaRPr lang="zh-TW" altLang="en-US"/>
           </a:p>
         </p:txBody>
       </p:sp>
@@ -1329,7 +1337,7 @@
             <a:fld id="{DB6A4473-6871-43EA-8769-892AAA22AF74}" type="datetimeFigureOut">
               <a:rPr lang="zh-TW" altLang="en-US" smtClean="0"/>
               <a:pPr/>
-              <a:t>2019/7/20</a:t>
+              <a:t>2025/8/24</a:t>
             </a:fld>
             <a:endParaRPr lang="zh-TW" altLang="en-US"/>
           </a:p>
@@ -1423,10 +1431,9 @@
           </a:lstStyle>
           <a:p>
             <a:r>
-              <a:rPr lang="zh-TW" altLang="en-US" smtClean="0"/>
+              <a:rPr lang="zh-TW" altLang="en-US"/>
               <a:t>按一下以編輯母片標題樣式</a:t>
             </a:r>
-            <a:endParaRPr lang="zh-TW" altLang="en-US"/>
           </a:p>
         </p:txBody>
       </p:sp>
@@ -1489,7 +1496,7 @@
           <a:p>
             <a:pPr lvl="0"/>
             <a:r>
-              <a:rPr lang="zh-TW" altLang="en-US" smtClean="0"/>
+              <a:rPr lang="zh-TW" altLang="en-US"/>
               <a:t>按一下以編輯母片文字樣式</a:t>
             </a:r>
           </a:p>
@@ -1545,38 +1552,37 @@
           <a:p>
             <a:pPr lvl="0"/>
             <a:r>
-              <a:rPr lang="zh-TW" altLang="en-US" smtClean="0"/>
+              <a:rPr lang="zh-TW" altLang="en-US"/>
               <a:t>按一下以編輯母片文字樣式</a:t>
             </a:r>
           </a:p>
           <a:p>
             <a:pPr lvl="1"/>
             <a:r>
-              <a:rPr lang="zh-TW" altLang="en-US" smtClean="0"/>
+              <a:rPr lang="zh-TW" altLang="en-US"/>
               <a:t>第二層</a:t>
             </a:r>
           </a:p>
           <a:p>
             <a:pPr lvl="2"/>
             <a:r>
-              <a:rPr lang="zh-TW" altLang="en-US" smtClean="0"/>
+              <a:rPr lang="zh-TW" altLang="en-US"/>
               <a:t>第三層</a:t>
             </a:r>
           </a:p>
           <a:p>
             <a:pPr lvl="3"/>
             <a:r>
-              <a:rPr lang="zh-TW" altLang="en-US" smtClean="0"/>
+              <a:rPr lang="zh-TW" altLang="en-US"/>
               <a:t>第四層</a:t>
             </a:r>
           </a:p>
           <a:p>
             <a:pPr lvl="4"/>
             <a:r>
-              <a:rPr lang="zh-TW" altLang="en-US" smtClean="0"/>
+              <a:rPr lang="zh-TW" altLang="en-US"/>
               <a:t>第五層</a:t>
             </a:r>
-            <a:endParaRPr lang="zh-TW" altLang="en-US"/>
           </a:p>
         </p:txBody>
       </p:sp>
@@ -1639,7 +1645,7 @@
           <a:p>
             <a:pPr lvl="0"/>
             <a:r>
-              <a:rPr lang="zh-TW" altLang="en-US" smtClean="0"/>
+              <a:rPr lang="zh-TW" altLang="en-US"/>
               <a:t>按一下以編輯母片文字樣式</a:t>
             </a:r>
           </a:p>
@@ -1695,38 +1701,37 @@
           <a:p>
             <a:pPr lvl="0"/>
             <a:r>
-              <a:rPr lang="zh-TW" altLang="en-US" smtClean="0"/>
+              <a:rPr lang="zh-TW" altLang="en-US"/>
               <a:t>按一下以編輯母片文字樣式</a:t>
             </a:r>
           </a:p>
           <a:p>
             <a:pPr lvl="1"/>
             <a:r>
-              <a:rPr lang="zh-TW" altLang="en-US" smtClean="0"/>
+              <a:rPr lang="zh-TW" altLang="en-US"/>
               <a:t>第二層</a:t>
             </a:r>
           </a:p>
           <a:p>
             <a:pPr lvl="2"/>
             <a:r>
-              <a:rPr lang="zh-TW" altLang="en-US" smtClean="0"/>
+              <a:rPr lang="zh-TW" altLang="en-US"/>
               <a:t>第三層</a:t>
             </a:r>
           </a:p>
           <a:p>
             <a:pPr lvl="3"/>
             <a:r>
-              <a:rPr lang="zh-TW" altLang="en-US" smtClean="0"/>
+              <a:rPr lang="zh-TW" altLang="en-US"/>
               <a:t>第四層</a:t>
             </a:r>
           </a:p>
           <a:p>
             <a:pPr lvl="4"/>
             <a:r>
-              <a:rPr lang="zh-TW" altLang="en-US" smtClean="0"/>
+              <a:rPr lang="zh-TW" altLang="en-US"/>
               <a:t>第五層</a:t>
             </a:r>
-            <a:endParaRPr lang="zh-TW" altLang="en-US"/>
           </a:p>
         </p:txBody>
       </p:sp>
@@ -1748,7 +1753,7 @@
             <a:fld id="{DB6A4473-6871-43EA-8769-892AAA22AF74}" type="datetimeFigureOut">
               <a:rPr lang="zh-TW" altLang="en-US" smtClean="0"/>
               <a:pPr/>
-              <a:t>2019/7/20</a:t>
+              <a:t>2025/8/24</a:t>
             </a:fld>
             <a:endParaRPr lang="zh-TW" altLang="en-US"/>
           </a:p>
@@ -1838,10 +1843,9 @@
           <a:lstStyle/>
           <a:p>
             <a:r>
-              <a:rPr lang="zh-TW" altLang="en-US" smtClean="0"/>
+              <a:rPr lang="zh-TW" altLang="en-US"/>
               <a:t>按一下以編輯母片標題樣式</a:t>
             </a:r>
-            <a:endParaRPr lang="zh-TW" altLang="en-US"/>
           </a:p>
         </p:txBody>
       </p:sp>
@@ -1863,7 +1867,7 @@
             <a:fld id="{DB6A4473-6871-43EA-8769-892AAA22AF74}" type="datetimeFigureOut">
               <a:rPr lang="zh-TW" altLang="en-US" smtClean="0"/>
               <a:pPr/>
-              <a:t>2019/7/20</a:t>
+              <a:t>2025/8/24</a:t>
             </a:fld>
             <a:endParaRPr lang="zh-TW" altLang="en-US"/>
           </a:p>
@@ -1955,7 +1959,7 @@
             <a:fld id="{DB6A4473-6871-43EA-8769-892AAA22AF74}" type="datetimeFigureOut">
               <a:rPr lang="zh-TW" altLang="en-US" smtClean="0"/>
               <a:pPr/>
-              <a:t>2019/7/20</a:t>
+              <a:t>2025/8/24</a:t>
             </a:fld>
             <a:endParaRPr lang="zh-TW" altLang="en-US"/>
           </a:p>
@@ -2054,10 +2058,9 @@
           </a:lstStyle>
           <a:p>
             <a:r>
-              <a:rPr lang="zh-TW" altLang="en-US" smtClean="0"/>
+              <a:rPr lang="zh-TW" altLang="en-US"/>
               <a:t>按一下以編輯母片標題樣式</a:t>
             </a:r>
-            <a:endParaRPr lang="zh-TW" altLang="en-US"/>
           </a:p>
         </p:txBody>
       </p:sp>
@@ -2111,38 +2114,37 @@
           <a:p>
             <a:pPr lvl="0"/>
             <a:r>
-              <a:rPr lang="zh-TW" altLang="en-US" smtClean="0"/>
+              <a:rPr lang="zh-TW" altLang="en-US"/>
               <a:t>按一下以編輯母片文字樣式</a:t>
             </a:r>
           </a:p>
           <a:p>
             <a:pPr lvl="1"/>
             <a:r>
-              <a:rPr lang="zh-TW" altLang="en-US" smtClean="0"/>
+              <a:rPr lang="zh-TW" altLang="en-US"/>
               <a:t>第二層</a:t>
             </a:r>
           </a:p>
           <a:p>
             <a:pPr lvl="2"/>
             <a:r>
-              <a:rPr lang="zh-TW" altLang="en-US" smtClean="0"/>
+              <a:rPr lang="zh-TW" altLang="en-US"/>
               <a:t>第三層</a:t>
             </a:r>
           </a:p>
           <a:p>
             <a:pPr lvl="3"/>
             <a:r>
-              <a:rPr lang="zh-TW" altLang="en-US" smtClean="0"/>
+              <a:rPr lang="zh-TW" altLang="en-US"/>
               <a:t>第四層</a:t>
             </a:r>
           </a:p>
           <a:p>
             <a:pPr lvl="4"/>
             <a:r>
-              <a:rPr lang="zh-TW" altLang="en-US" smtClean="0"/>
+              <a:rPr lang="zh-TW" altLang="en-US"/>
               <a:t>第五層</a:t>
             </a:r>
-            <a:endParaRPr lang="zh-TW" altLang="en-US"/>
           </a:p>
         </p:txBody>
       </p:sp>
@@ -2205,7 +2207,7 @@
           <a:p>
             <a:pPr lvl="0"/>
             <a:r>
-              <a:rPr lang="zh-TW" altLang="en-US" smtClean="0"/>
+              <a:rPr lang="zh-TW" altLang="en-US"/>
               <a:t>按一下以編輯母片文字樣式</a:t>
             </a:r>
           </a:p>
@@ -2229,7 +2231,7 @@
             <a:fld id="{DB6A4473-6871-43EA-8769-892AAA22AF74}" type="datetimeFigureOut">
               <a:rPr lang="zh-TW" altLang="en-US" smtClean="0"/>
               <a:pPr/>
-              <a:t>2019/7/20</a:t>
+              <a:t>2025/8/24</a:t>
             </a:fld>
             <a:endParaRPr lang="zh-TW" altLang="en-US"/>
           </a:p>
@@ -2328,10 +2330,9 @@
           </a:lstStyle>
           <a:p>
             <a:r>
-              <a:rPr lang="zh-TW" altLang="en-US" smtClean="0"/>
+              <a:rPr lang="zh-TW" altLang="en-US"/>
               <a:t>按一下以編輯母片標題樣式</a:t>
             </a:r>
-            <a:endParaRPr lang="zh-TW" altLang="en-US"/>
           </a:p>
         </p:txBody>
       </p:sp>
@@ -2393,10 +2394,9 @@
           </a:lstStyle>
           <a:p>
             <a:r>
-              <a:rPr lang="zh-TW" altLang="en-US" smtClean="0"/>
+              <a:rPr lang="zh-TW" altLang="en-US"/>
               <a:t>按一下圖示以新增圖片</a:t>
             </a:r>
-            <a:endParaRPr lang="zh-TW" altLang="en-US"/>
           </a:p>
         </p:txBody>
       </p:sp>
@@ -2459,7 +2459,7 @@
           <a:p>
             <a:pPr lvl="0"/>
             <a:r>
-              <a:rPr lang="zh-TW" altLang="en-US" smtClean="0"/>
+              <a:rPr lang="zh-TW" altLang="en-US"/>
               <a:t>按一下以編輯母片文字樣式</a:t>
             </a:r>
           </a:p>
@@ -2483,7 +2483,7 @@
             <a:fld id="{DB6A4473-6871-43EA-8769-892AAA22AF74}" type="datetimeFigureOut">
               <a:rPr lang="zh-TW" altLang="en-US" smtClean="0"/>
               <a:pPr/>
-              <a:t>2019/7/20</a:t>
+              <a:t>2025/8/24</a:t>
             </a:fld>
             <a:endParaRPr lang="zh-TW" altLang="en-US"/>
           </a:p>
@@ -2593,10 +2593,9 @@
           <a:lstStyle/>
           <a:p>
             <a:r>
-              <a:rPr lang="zh-TW" altLang="en-US" smtClean="0"/>
+              <a:rPr lang="zh-TW" altLang="en-US"/>
               <a:t>按一下以編輯母片標題樣式</a:t>
             </a:r>
-            <a:endParaRPr lang="zh-TW" altLang="en-US"/>
           </a:p>
         </p:txBody>
       </p:sp>
@@ -2627,38 +2626,37 @@
           <a:p>
             <a:pPr lvl="0"/>
             <a:r>
-              <a:rPr lang="zh-TW" altLang="en-US" smtClean="0"/>
+              <a:rPr lang="zh-TW" altLang="en-US"/>
               <a:t>按一下以編輯母片文字樣式</a:t>
             </a:r>
           </a:p>
           <a:p>
             <a:pPr lvl="1"/>
             <a:r>
-              <a:rPr lang="zh-TW" altLang="en-US" smtClean="0"/>
+              <a:rPr lang="zh-TW" altLang="en-US"/>
               <a:t>第二層</a:t>
             </a:r>
           </a:p>
           <a:p>
             <a:pPr lvl="2"/>
             <a:r>
-              <a:rPr lang="zh-TW" altLang="en-US" smtClean="0"/>
+              <a:rPr lang="zh-TW" altLang="en-US"/>
               <a:t>第三層</a:t>
             </a:r>
           </a:p>
           <a:p>
             <a:pPr lvl="3"/>
             <a:r>
-              <a:rPr lang="zh-TW" altLang="en-US" smtClean="0"/>
+              <a:rPr lang="zh-TW" altLang="en-US"/>
               <a:t>第四層</a:t>
             </a:r>
           </a:p>
           <a:p>
             <a:pPr lvl="4"/>
             <a:r>
-              <a:rPr lang="zh-TW" altLang="en-US" smtClean="0"/>
+              <a:rPr lang="zh-TW" altLang="en-US"/>
               <a:t>第五層</a:t>
             </a:r>
-            <a:endParaRPr lang="zh-TW" altLang="en-US"/>
           </a:p>
         </p:txBody>
       </p:sp>
@@ -2698,7 +2696,7 @@
             <a:fld id="{DB6A4473-6871-43EA-8769-892AAA22AF74}" type="datetimeFigureOut">
               <a:rPr lang="zh-TW" altLang="en-US" smtClean="0"/>
               <a:pPr/>
-              <a:t>2019/7/20</a:t>
+              <a:t>2025/8/24</a:t>
             </a:fld>
             <a:endParaRPr lang="zh-TW" altLang="en-US"/>
           </a:p>
@@ -3057,7 +3055,13 @@
   <p:cSld>
     <p:spTree>
       <p:nvGrpSpPr>
-        <p:cNvPr id="1" name=""/>
+        <p:cNvPr id="1" name="">
+          <a:extLst>
+            <a:ext uri="{FF2B5EF4-FFF2-40B4-BE49-F238E27FC236}">
+              <a16:creationId xmlns:a16="http://schemas.microsoft.com/office/drawing/2014/main" id="{5F20F3D7-EDDF-CE30-9060-314A88E3730B}"/>
+            </a:ext>
+          </a:extLst>
+        </p:cNvPr>
         <p:cNvGrpSpPr/>
         <p:nvPr/>
       </p:nvGrpSpPr>
@@ -3071,7 +3075,13 @@
       </p:grpSpPr>
       <p:sp>
         <p:nvSpPr>
-          <p:cNvPr id="2" name="標題 1"/>
+          <p:cNvPr id="4" name="標題 3">
+            <a:extLst>
+              <a:ext uri="{FF2B5EF4-FFF2-40B4-BE49-F238E27FC236}">
+                <a16:creationId xmlns:a16="http://schemas.microsoft.com/office/drawing/2014/main" id="{CD6A41DD-B5E6-D530-EC0F-85726817D119}"/>
+              </a:ext>
+            </a:extLst>
+          </p:cNvPr>
           <p:cNvSpPr>
             <a:spLocks noGrp="1"/>
           </p:cNvSpPr>
@@ -3079,149 +3089,48 @@
             <p:ph type="title"/>
           </p:nvPr>
         </p:nvSpPr>
-        <p:spPr/>
+        <p:spPr>
+          <a:xfrm>
+            <a:off x="0" y="1995686"/>
+            <a:ext cx="9144000" cy="857250"/>
+          </a:xfrm>
+        </p:spPr>
         <p:txBody>
           <a:bodyPr>
-            <a:normAutofit/>
+            <a:noAutofit/>
           </a:bodyPr>
           <a:lstStyle/>
           <a:p>
             <a:r>
-              <a:rPr lang="zh-TW" altLang="en-US" sz="4000" b="1" dirty="0">
+              <a:rPr lang="zh-TW" altLang="en-US" sz="5400" b="1" i="1" dirty="0">
                 <a:solidFill>
                   <a:srgbClr val="000066"/>
                 </a:solidFill>
+                <a:effectLst>
+                  <a:outerShdw blurRad="38100" dist="38100" dir="2700000" algn="tl">
+                    <a:srgbClr val="000000">
+                      <a:alpha val="43137"/>
+                    </a:srgbClr>
+                  </a:outerShdw>
+                </a:effectLst>
                 <a:latin typeface="微軟正黑體" pitchFamily="34" charset="-120"/>
                 <a:ea typeface="微軟正黑體" pitchFamily="34" charset="-120"/>
               </a:rPr>
-              <a:t>除你以外</a:t>
-            </a:r>
-          </a:p>
-        </p:txBody>
-      </p:sp>
-      <p:sp>
-        <p:nvSpPr>
-          <p:cNvPr id="3" name="內容版面配置區 2"/>
-          <p:cNvSpPr>
-            <a:spLocks noGrp="1"/>
-          </p:cNvSpPr>
-          <p:nvPr>
-            <p:ph idx="1"/>
-          </p:nvPr>
-        </p:nvSpPr>
-        <p:spPr>
-          <a:xfrm>
-            <a:off x="0" y="1200151"/>
-            <a:ext cx="9144000" cy="3394472"/>
-          </a:xfrm>
-        </p:spPr>
-        <p:txBody>
-          <a:bodyPr>
-            <a:noAutofit/>
-          </a:bodyPr>
-          <a:lstStyle/>
-          <a:p>
-            <a:pPr algn="ctr">
-              <a:buNone/>
-            </a:pPr>
-            <a:r>
-              <a:rPr lang="zh-TW" altLang="en-US" sz="4400" b="1" dirty="0" smtClean="0">
-                <a:solidFill>
-                  <a:srgbClr val="000066"/>
-                </a:solidFill>
-                <a:latin typeface="微軟正黑體" pitchFamily="34" charset="-120"/>
-                <a:ea typeface="微軟正黑體" pitchFamily="34" charset="-120"/>
-              </a:rPr>
-              <a:t>大地頌讚歡唱  讚美你名字</a:t>
-            </a:r>
-            <a:endParaRPr lang="en-US" altLang="zh-TW" sz="4400" b="1" dirty="0" smtClean="0">
-              <a:solidFill>
-                <a:srgbClr val="000066"/>
-              </a:solidFill>
-              <a:latin typeface="微軟正黑體" pitchFamily="34" charset="-120"/>
-              <a:ea typeface="微軟正黑體" pitchFamily="34" charset="-120"/>
-            </a:endParaRPr>
-          </a:p>
-          <a:p>
-            <a:pPr algn="ctr">
-              <a:buNone/>
-            </a:pPr>
-            <a:r>
-              <a:rPr lang="zh-TW" altLang="en-US" sz="4400" b="1" dirty="0" smtClean="0">
-                <a:solidFill>
-                  <a:srgbClr val="000066"/>
-                </a:solidFill>
-                <a:latin typeface="微軟正黑體" pitchFamily="34" charset="-120"/>
-                <a:ea typeface="微軟正黑體" pitchFamily="34" charset="-120"/>
-              </a:rPr>
-              <a:t>耶穌尊貴高超過一切</a:t>
-            </a:r>
-            <a:endParaRPr lang="en-US" altLang="zh-TW" sz="4400" b="1" dirty="0" smtClean="0">
-              <a:solidFill>
-                <a:srgbClr val="000066"/>
-              </a:solidFill>
-              <a:latin typeface="微軟正黑體" pitchFamily="34" charset="-120"/>
-              <a:ea typeface="微軟正黑體" pitchFamily="34" charset="-120"/>
-            </a:endParaRPr>
-          </a:p>
-          <a:p>
-            <a:pPr algn="ctr">
-              <a:buNone/>
-            </a:pPr>
-            <a:r>
-              <a:rPr lang="zh-TW" altLang="en-US" sz="4400" b="1" dirty="0" smtClean="0">
-                <a:solidFill>
-                  <a:srgbClr val="000066"/>
-                </a:solidFill>
-                <a:latin typeface="微軟正黑體" pitchFamily="34" charset="-120"/>
-                <a:ea typeface="微軟正黑體" pitchFamily="34" charset="-120"/>
-              </a:rPr>
-              <a:t>萬族萬國高唱  讚美你名字</a:t>
-            </a:r>
-            <a:endParaRPr lang="en-US" altLang="zh-TW" sz="4400" b="1" dirty="0" smtClean="0">
-              <a:solidFill>
-                <a:srgbClr val="000066"/>
-              </a:solidFill>
-              <a:latin typeface="微軟正黑體" pitchFamily="34" charset="-120"/>
-              <a:ea typeface="微軟正黑體" pitchFamily="34" charset="-120"/>
-            </a:endParaRPr>
-          </a:p>
-          <a:p>
-            <a:pPr algn="ctr">
-              <a:buNone/>
-            </a:pPr>
-            <a:r>
-              <a:rPr lang="zh-TW" altLang="en-US" sz="4400" b="1" dirty="0" smtClean="0">
-                <a:solidFill>
-                  <a:srgbClr val="000066"/>
-                </a:solidFill>
-                <a:latin typeface="微軟正黑體" pitchFamily="34" charset="-120"/>
-                <a:ea typeface="微軟正黑體" pitchFamily="34" charset="-120"/>
-              </a:rPr>
-              <a:t>從永遠到永遠  你超過諸天</a:t>
-            </a:r>
-            <a:endParaRPr lang="zh-TW" altLang="en-US" sz="4400" b="1" dirty="0">
-              <a:solidFill>
-                <a:srgbClr val="000066"/>
-              </a:solidFill>
-              <a:latin typeface="微軟正黑體" pitchFamily="34" charset="-120"/>
-              <a:ea typeface="微軟正黑體" pitchFamily="34" charset="-120"/>
-            </a:endParaRPr>
+              <a:t>除祢以外</a:t>
+            </a:r>
           </a:p>
         </p:txBody>
       </p:sp>
     </p:spTree>
+    <p:extLst>
+      <p:ext uri="{BB962C8B-B14F-4D97-AF65-F5344CB8AC3E}">
+        <p14:creationId xmlns:p14="http://schemas.microsoft.com/office/powerpoint/2010/main" val="388492399"/>
+      </p:ext>
+    </p:extLst>
   </p:cSld>
   <p:clrMapOvr>
     <a:masterClrMapping/>
   </p:clrMapOvr>
-  <p:timing>
-    <p:tnLst>
-      <p:par>
-        <p:cTn id="1" dur="indefinite" restart="never" nodeType="tmRoot"/>
-      </p:par>
-    </p:tnLst>
-  </p:timing>
 </p:sld>
 </file>
 
@@ -3230,7 +3139,13 @@
   <p:cSld>
     <p:spTree>
       <p:nvGrpSpPr>
-        <p:cNvPr id="1" name=""/>
+        <p:cNvPr id="1" name="">
+          <a:extLst>
+            <a:ext uri="{FF2B5EF4-FFF2-40B4-BE49-F238E27FC236}">
+              <a16:creationId xmlns:a16="http://schemas.microsoft.com/office/drawing/2014/main" id="{499F6A04-361B-D03C-72FC-83746A3861FC}"/>
+            </a:ext>
+          </a:extLst>
+        </p:cNvPr>
         <p:cNvGrpSpPr/>
         <p:nvPr/>
       </p:nvGrpSpPr>
@@ -3244,70 +3159,535 @@
       </p:grpSpPr>
       <p:sp>
         <p:nvSpPr>
-          <p:cNvPr id="2" name="標題 1"/>
-          <p:cNvSpPr>
-            <a:spLocks noGrp="1"/>
-          </p:cNvSpPr>
-          <p:nvPr>
-            <p:ph type="title"/>
-          </p:nvPr>
-        </p:nvSpPr>
-        <p:spPr/>
-        <p:txBody>
-          <a:bodyPr>
+          <p:cNvPr id="5" name="內容版面配置區 4">
+            <a:extLst>
+              <a:ext uri="{FF2B5EF4-FFF2-40B4-BE49-F238E27FC236}">
+                <a16:creationId xmlns:a16="http://schemas.microsoft.com/office/drawing/2014/main" id="{EE77592B-EE8B-614D-4160-CDFC7BCE80DB}"/>
+              </a:ext>
+            </a:extLst>
+          </p:cNvPr>
+          <p:cNvSpPr>
+            <a:spLocks noGrp="1"/>
+          </p:cNvSpPr>
+          <p:nvPr>
+            <p:ph idx="1"/>
+          </p:nvPr>
+        </p:nvSpPr>
+        <p:spPr>
+          <a:xfrm>
+            <a:off x="0" y="1563639"/>
+            <a:ext cx="9144000" cy="1803647"/>
+          </a:xfrm>
+        </p:spPr>
+        <p:txBody>
+          <a:bodyPr anchor="ctr">
             <a:normAutofit/>
           </a:bodyPr>
           <a:lstStyle/>
           <a:p>
-            <a:r>
-              <a:rPr lang="zh-TW" altLang="en-US" sz="4000" b="1" dirty="0">
+            <a:pPr algn="ctr">
+              <a:buNone/>
+            </a:pPr>
+            <a:r>
+              <a:rPr lang="zh-TW" altLang="en-US" sz="4800" b="1" dirty="0">
                 <a:solidFill>
                   <a:srgbClr val="000066"/>
                 </a:solidFill>
                 <a:latin typeface="微軟正黑體" pitchFamily="34" charset="-120"/>
                 <a:ea typeface="微軟正黑體" pitchFamily="34" charset="-120"/>
               </a:rPr>
-              <a:t>除你以外</a:t>
-            </a:r>
-          </a:p>
-        </p:txBody>
-      </p:sp>
-      <p:sp>
-        <p:nvSpPr>
-          <p:cNvPr id="3" name="內容版面配置區 2"/>
-          <p:cNvSpPr>
-            <a:spLocks noGrp="1"/>
-          </p:cNvSpPr>
-          <p:nvPr>
-            <p:ph idx="1"/>
-          </p:nvPr>
-        </p:nvSpPr>
-        <p:spPr>
-          <a:xfrm>
-            <a:off x="0" y="1200150"/>
-            <a:ext cx="9144000" cy="3943350"/>
-          </a:xfrm>
-        </p:spPr>
-        <p:txBody>
-          <a:bodyPr>
-            <a:noAutofit/>
-          </a:bodyPr>
-          <a:lstStyle/>
+              <a:t>大地頌讚歡唱  讚美祢名字</a:t>
+            </a:r>
+          </a:p>
           <a:p>
             <a:pPr algn="ctr">
               <a:buNone/>
             </a:pPr>
             <a:r>
-              <a:rPr lang="zh-TW" altLang="en-US" sz="4400" b="1" dirty="0">
+              <a:rPr lang="zh-TW" altLang="en-US" sz="4800" b="1" dirty="0">
                 <a:solidFill>
                   <a:srgbClr val="000066"/>
                 </a:solidFill>
                 <a:latin typeface="微軟正黑體" pitchFamily="34" charset="-120"/>
                 <a:ea typeface="微軟正黑體" pitchFamily="34" charset="-120"/>
               </a:rPr>
-              <a:t>除你以外  找不到尊貴像你</a:t>
-            </a:r>
-            <a:endParaRPr lang="en-US" altLang="zh-TW" sz="4400" b="1" dirty="0">
+              <a:t>耶穌尊貴高超過一切</a:t>
+            </a:r>
+          </a:p>
+        </p:txBody>
+      </p:sp>
+      <p:sp>
+        <p:nvSpPr>
+          <p:cNvPr id="3" name="TextBox 2">
+            <a:extLst>
+              <a:ext uri="{FF2B5EF4-FFF2-40B4-BE49-F238E27FC236}">
+                <a16:creationId xmlns:a16="http://schemas.microsoft.com/office/drawing/2014/main" id="{FA175DD0-F211-14DE-420F-4A50F79B6BD2}"/>
+              </a:ext>
+            </a:extLst>
+          </p:cNvPr>
+          <p:cNvSpPr txBox="1"/>
+          <p:nvPr/>
+        </p:nvSpPr>
+        <p:spPr>
+          <a:xfrm>
+            <a:off x="0" y="3867895"/>
+            <a:ext cx="9144000" cy="461665"/>
+          </a:xfrm>
+          <a:prstGeom prst="rect">
+            <a:avLst/>
+          </a:prstGeom>
+          <a:noFill/>
+        </p:spPr>
+        <p:txBody>
+          <a:bodyPr wrap="square" rtlCol="0">
+            <a:spAutoFit/>
+          </a:bodyPr>
+          <a:lstStyle/>
+          <a:p>
+            <a:pPr algn="ctr"/>
+            <a:r>
+              <a:rPr lang="en-US" sz="2400" b="1" dirty="0">
+                <a:solidFill>
+                  <a:srgbClr val="000066"/>
+                </a:solidFill>
+                <a:latin typeface="Microsoft JhengHei" panose="020B0604030504040204" pitchFamily="34" charset="-120"/>
+                <a:ea typeface="Microsoft JhengHei" panose="020B0604030504040204" pitchFamily="34" charset="-120"/>
+              </a:rPr>
+              <a:t>( </a:t>
+            </a:r>
+            <a:r>
+              <a:rPr lang="zh-CN" altLang="en-US" sz="2400" b="1" dirty="0">
+                <a:solidFill>
+                  <a:srgbClr val="000066"/>
+                </a:solidFill>
+                <a:latin typeface="Microsoft JhengHei" panose="020B0604030504040204" pitchFamily="34" charset="-120"/>
+                <a:ea typeface="Microsoft JhengHei" panose="020B0604030504040204" pitchFamily="34" charset="-120"/>
+              </a:rPr>
+              <a:t>正歌</a:t>
+            </a:r>
+            <a:r>
+              <a:rPr lang="en-US" sz="2400" b="1" dirty="0">
+                <a:solidFill>
+                  <a:srgbClr val="000066"/>
+                </a:solidFill>
+                <a:latin typeface="Microsoft JhengHei" panose="020B0604030504040204" pitchFamily="34" charset="-120"/>
+                <a:ea typeface="Microsoft JhengHei" panose="020B0604030504040204" pitchFamily="34" charset="-120"/>
+              </a:rPr>
+              <a:t> )</a:t>
+            </a:r>
+            <a:endParaRPr lang="vi-VN" sz="2400" b="1" dirty="0">
+              <a:solidFill>
+                <a:srgbClr val="000066"/>
+              </a:solidFill>
+              <a:ea typeface="Microsoft JhengHei" panose="020B0604030504040204" pitchFamily="34" charset="-120"/>
+            </a:endParaRPr>
+          </a:p>
+        </p:txBody>
+      </p:sp>
+    </p:spTree>
+    <p:extLst>
+      <p:ext uri="{BB962C8B-B14F-4D97-AF65-F5344CB8AC3E}">
+        <p14:creationId xmlns:p14="http://schemas.microsoft.com/office/powerpoint/2010/main" val="3885075056"/>
+      </p:ext>
+    </p:extLst>
+  </p:cSld>
+  <p:clrMapOvr>
+    <a:masterClrMapping/>
+  </p:clrMapOvr>
+</p:sld>
+</file>
+
+<file path=ppt/slides/slide3.xml><?xml version="1.0" encoding="utf-8"?>
+<p:sld xmlns:a="http://schemas.openxmlformats.org/drawingml/2006/main" xmlns:r="http://schemas.openxmlformats.org/officeDocument/2006/relationships" xmlns:p="http://schemas.openxmlformats.org/presentationml/2006/main">
+  <p:cSld>
+    <p:spTree>
+      <p:nvGrpSpPr>
+        <p:cNvPr id="1" name="">
+          <a:extLst>
+            <a:ext uri="{FF2B5EF4-FFF2-40B4-BE49-F238E27FC236}">
+              <a16:creationId xmlns:a16="http://schemas.microsoft.com/office/drawing/2014/main" id="{01A74038-377F-3F18-7833-D3469C676034}"/>
+            </a:ext>
+          </a:extLst>
+        </p:cNvPr>
+        <p:cNvGrpSpPr/>
+        <p:nvPr/>
+      </p:nvGrpSpPr>
+      <p:grpSpPr>
+        <a:xfrm>
+          <a:off x="0" y="0"/>
+          <a:ext cx="0" cy="0"/>
+          <a:chOff x="0" y="0"/>
+          <a:chExt cx="0" cy="0"/>
+        </a:xfrm>
+      </p:grpSpPr>
+      <p:sp>
+        <p:nvSpPr>
+          <p:cNvPr id="5" name="內容版面配置區 4">
+            <a:extLst>
+              <a:ext uri="{FF2B5EF4-FFF2-40B4-BE49-F238E27FC236}">
+                <a16:creationId xmlns:a16="http://schemas.microsoft.com/office/drawing/2014/main" id="{0DE171BC-C4A8-02BB-CD32-DC4D99565E62}"/>
+              </a:ext>
+            </a:extLst>
+          </p:cNvPr>
+          <p:cNvSpPr>
+            <a:spLocks noGrp="1"/>
+          </p:cNvSpPr>
+          <p:nvPr>
+            <p:ph idx="1"/>
+          </p:nvPr>
+        </p:nvSpPr>
+        <p:spPr>
+          <a:xfrm>
+            <a:off x="0" y="1563639"/>
+            <a:ext cx="9144000" cy="1803647"/>
+          </a:xfrm>
+        </p:spPr>
+        <p:txBody>
+          <a:bodyPr anchor="ctr">
+            <a:normAutofit/>
+          </a:bodyPr>
+          <a:lstStyle/>
+          <a:p>
+            <a:pPr algn="ctr">
+              <a:buNone/>
+            </a:pPr>
+            <a:r>
+              <a:rPr lang="zh-TW" altLang="en-US" sz="4800" b="1" dirty="0">
+                <a:solidFill>
+                  <a:srgbClr val="000066"/>
+                </a:solidFill>
+                <a:latin typeface="微軟正黑體" pitchFamily="34" charset="-120"/>
+                <a:ea typeface="微軟正黑體" pitchFamily="34" charset="-120"/>
+              </a:rPr>
+              <a:t>萬族萬國高唱  讚美祢名字</a:t>
+            </a:r>
+          </a:p>
+          <a:p>
+            <a:pPr algn="ctr">
+              <a:buNone/>
+            </a:pPr>
+            <a:r>
+              <a:rPr lang="zh-TW" altLang="en-US" sz="4800" b="1" dirty="0">
+                <a:solidFill>
+                  <a:srgbClr val="000066"/>
+                </a:solidFill>
+                <a:latin typeface="微軟正黑體" pitchFamily="34" charset="-120"/>
+                <a:ea typeface="微軟正黑體" pitchFamily="34" charset="-120"/>
+              </a:rPr>
+              <a:t>從永遠到永遠  祢超過諸天</a:t>
+            </a:r>
+          </a:p>
+        </p:txBody>
+      </p:sp>
+      <p:sp>
+        <p:nvSpPr>
+          <p:cNvPr id="3" name="TextBox 2">
+            <a:extLst>
+              <a:ext uri="{FF2B5EF4-FFF2-40B4-BE49-F238E27FC236}">
+                <a16:creationId xmlns:a16="http://schemas.microsoft.com/office/drawing/2014/main" id="{0587327B-DC12-8445-2B01-D6A294529270}"/>
+              </a:ext>
+            </a:extLst>
+          </p:cNvPr>
+          <p:cNvSpPr txBox="1"/>
+          <p:nvPr/>
+        </p:nvSpPr>
+        <p:spPr>
+          <a:xfrm>
+            <a:off x="0" y="3867895"/>
+            <a:ext cx="9144000" cy="461665"/>
+          </a:xfrm>
+          <a:prstGeom prst="rect">
+            <a:avLst/>
+          </a:prstGeom>
+          <a:noFill/>
+        </p:spPr>
+        <p:txBody>
+          <a:bodyPr wrap="square" rtlCol="0">
+            <a:spAutoFit/>
+          </a:bodyPr>
+          <a:lstStyle/>
+          <a:p>
+            <a:pPr algn="ctr"/>
+            <a:r>
+              <a:rPr lang="en-US" sz="2400" b="1" dirty="0">
+                <a:solidFill>
+                  <a:srgbClr val="000066"/>
+                </a:solidFill>
+                <a:latin typeface="Microsoft JhengHei" panose="020B0604030504040204" pitchFamily="34" charset="-120"/>
+                <a:ea typeface="Microsoft JhengHei" panose="020B0604030504040204" pitchFamily="34" charset="-120"/>
+              </a:rPr>
+              <a:t>( </a:t>
+            </a:r>
+            <a:r>
+              <a:rPr lang="zh-CN" altLang="en-US" sz="2400" b="1" dirty="0">
+                <a:solidFill>
+                  <a:srgbClr val="000066"/>
+                </a:solidFill>
+                <a:latin typeface="Microsoft JhengHei" panose="020B0604030504040204" pitchFamily="34" charset="-120"/>
+                <a:ea typeface="Microsoft JhengHei" panose="020B0604030504040204" pitchFamily="34" charset="-120"/>
+              </a:rPr>
+              <a:t>正歌</a:t>
+            </a:r>
+            <a:r>
+              <a:rPr lang="en-US" sz="2400" b="1" dirty="0">
+                <a:solidFill>
+                  <a:srgbClr val="000066"/>
+                </a:solidFill>
+                <a:latin typeface="Microsoft JhengHei" panose="020B0604030504040204" pitchFamily="34" charset="-120"/>
+                <a:ea typeface="Microsoft JhengHei" panose="020B0604030504040204" pitchFamily="34" charset="-120"/>
+              </a:rPr>
+              <a:t> )</a:t>
+            </a:r>
+            <a:endParaRPr lang="vi-VN" sz="2400" b="1" dirty="0">
+              <a:solidFill>
+                <a:srgbClr val="000066"/>
+              </a:solidFill>
+              <a:ea typeface="Microsoft JhengHei" panose="020B0604030504040204" pitchFamily="34" charset="-120"/>
+            </a:endParaRPr>
+          </a:p>
+        </p:txBody>
+      </p:sp>
+    </p:spTree>
+    <p:extLst>
+      <p:ext uri="{BB962C8B-B14F-4D97-AF65-F5344CB8AC3E}">
+        <p14:creationId xmlns:p14="http://schemas.microsoft.com/office/powerpoint/2010/main" val="4049571039"/>
+      </p:ext>
+    </p:extLst>
+  </p:cSld>
+  <p:clrMapOvr>
+    <a:masterClrMapping/>
+  </p:clrMapOvr>
+</p:sld>
+</file>
+
+<file path=ppt/slides/slide4.xml><?xml version="1.0" encoding="utf-8"?>
+<p:sld xmlns:a="http://schemas.openxmlformats.org/drawingml/2006/main" xmlns:r="http://schemas.openxmlformats.org/officeDocument/2006/relationships" xmlns:p="http://schemas.openxmlformats.org/presentationml/2006/main">
+  <p:cSld>
+    <p:spTree>
+      <p:nvGrpSpPr>
+        <p:cNvPr id="1" name="">
+          <a:extLst>
+            <a:ext uri="{FF2B5EF4-FFF2-40B4-BE49-F238E27FC236}">
+              <a16:creationId xmlns:a16="http://schemas.microsoft.com/office/drawing/2014/main" id="{02C0A4C1-6102-03C1-5CA2-04C863B23406}"/>
+            </a:ext>
+          </a:extLst>
+        </p:cNvPr>
+        <p:cNvGrpSpPr/>
+        <p:nvPr/>
+      </p:nvGrpSpPr>
+      <p:grpSpPr>
+        <a:xfrm>
+          <a:off x="0" y="0"/>
+          <a:ext cx="0" cy="0"/>
+          <a:chOff x="0" y="0"/>
+          <a:chExt cx="0" cy="0"/>
+        </a:xfrm>
+      </p:grpSpPr>
+      <p:sp>
+        <p:nvSpPr>
+          <p:cNvPr id="5" name="內容版面配置區 4">
+            <a:extLst>
+              <a:ext uri="{FF2B5EF4-FFF2-40B4-BE49-F238E27FC236}">
+                <a16:creationId xmlns:a16="http://schemas.microsoft.com/office/drawing/2014/main" id="{80ECF9E7-4445-75C9-C803-5895CCB20E0F}"/>
+              </a:ext>
+            </a:extLst>
+          </p:cNvPr>
+          <p:cNvSpPr>
+            <a:spLocks noGrp="1"/>
+          </p:cNvSpPr>
+          <p:nvPr>
+            <p:ph idx="1"/>
+          </p:nvPr>
+        </p:nvSpPr>
+        <p:spPr>
+          <a:xfrm>
+            <a:off x="0" y="1563639"/>
+            <a:ext cx="9144000" cy="1803647"/>
+          </a:xfrm>
+        </p:spPr>
+        <p:txBody>
+          <a:bodyPr anchor="ctr">
+            <a:normAutofit/>
+          </a:bodyPr>
+          <a:lstStyle/>
+          <a:p>
+            <a:pPr algn="ctr">
+              <a:buNone/>
+            </a:pPr>
+            <a:r>
+              <a:rPr lang="zh-TW" altLang="en-US" sz="4800" b="1" dirty="0">
+                <a:solidFill>
+                  <a:srgbClr val="000066"/>
+                </a:solidFill>
+                <a:latin typeface="微軟正黑體" pitchFamily="34" charset="-120"/>
+                <a:ea typeface="微軟正黑體" pitchFamily="34" charset="-120"/>
+              </a:rPr>
+              <a:t>除祢以外  找不到尊貴像祢</a:t>
+            </a:r>
+          </a:p>
+          <a:p>
+            <a:pPr algn="ctr">
+              <a:buNone/>
+            </a:pPr>
+            <a:r>
+              <a:rPr lang="zh-TW" altLang="en-US" sz="4800" b="1" dirty="0">
+                <a:solidFill>
+                  <a:srgbClr val="000066"/>
+                </a:solidFill>
+                <a:latin typeface="微軟正黑體" pitchFamily="34" charset="-120"/>
+                <a:ea typeface="微軟正黑體" pitchFamily="34" charset="-120"/>
+              </a:rPr>
+              <a:t>除祢以外  找不到更美名字</a:t>
+            </a:r>
+          </a:p>
+        </p:txBody>
+      </p:sp>
+      <p:sp>
+        <p:nvSpPr>
+          <p:cNvPr id="3" name="TextBox 2">
+            <a:extLst>
+              <a:ext uri="{FF2B5EF4-FFF2-40B4-BE49-F238E27FC236}">
+                <a16:creationId xmlns:a16="http://schemas.microsoft.com/office/drawing/2014/main" id="{A7132308-240A-03A6-D351-25E130845884}"/>
+              </a:ext>
+            </a:extLst>
+          </p:cNvPr>
+          <p:cNvSpPr txBox="1"/>
+          <p:nvPr/>
+        </p:nvSpPr>
+        <p:spPr>
+          <a:xfrm>
+            <a:off x="0" y="3867895"/>
+            <a:ext cx="9144000" cy="461665"/>
+          </a:xfrm>
+          <a:prstGeom prst="rect">
+            <a:avLst/>
+          </a:prstGeom>
+          <a:noFill/>
+        </p:spPr>
+        <p:txBody>
+          <a:bodyPr wrap="square" rtlCol="0">
+            <a:spAutoFit/>
+          </a:bodyPr>
+          <a:lstStyle/>
+          <a:p>
+            <a:pPr algn="ctr"/>
+            <a:r>
+              <a:rPr lang="en-US" sz="2400" b="1" dirty="0">
+                <a:solidFill>
+                  <a:srgbClr val="000066"/>
+                </a:solidFill>
+                <a:latin typeface="Microsoft JhengHei" panose="020B0604030504040204" pitchFamily="34" charset="-120"/>
+                <a:ea typeface="Microsoft JhengHei" panose="020B0604030504040204" pitchFamily="34" charset="-120"/>
+              </a:rPr>
+              <a:t>( </a:t>
+            </a:r>
+            <a:r>
+              <a:rPr lang="zh-CN" altLang="en-US" sz="2400" b="1" dirty="0">
+                <a:solidFill>
+                  <a:srgbClr val="000066"/>
+                </a:solidFill>
+                <a:latin typeface="Microsoft JhengHei" panose="020B0604030504040204" pitchFamily="34" charset="-120"/>
+                <a:ea typeface="Microsoft JhengHei" panose="020B0604030504040204" pitchFamily="34" charset="-120"/>
+              </a:rPr>
+              <a:t>副歌</a:t>
+            </a:r>
+            <a:r>
+              <a:rPr lang="en-US" sz="2400" b="1" dirty="0">
+                <a:solidFill>
+                  <a:srgbClr val="000066"/>
+                </a:solidFill>
+                <a:latin typeface="Microsoft JhengHei" panose="020B0604030504040204" pitchFamily="34" charset="-120"/>
+                <a:ea typeface="Microsoft JhengHei" panose="020B0604030504040204" pitchFamily="34" charset="-120"/>
+              </a:rPr>
+              <a:t> )</a:t>
+            </a:r>
+            <a:endParaRPr lang="vi-VN" sz="2400" b="1" dirty="0">
+              <a:solidFill>
+                <a:srgbClr val="000066"/>
+              </a:solidFill>
+              <a:ea typeface="Microsoft JhengHei" panose="020B0604030504040204" pitchFamily="34" charset="-120"/>
+            </a:endParaRPr>
+          </a:p>
+        </p:txBody>
+      </p:sp>
+    </p:spTree>
+    <p:extLst>
+      <p:ext uri="{BB962C8B-B14F-4D97-AF65-F5344CB8AC3E}">
+        <p14:creationId xmlns:p14="http://schemas.microsoft.com/office/powerpoint/2010/main" val="475014299"/>
+      </p:ext>
+    </p:extLst>
+  </p:cSld>
+  <p:clrMapOvr>
+    <a:masterClrMapping/>
+  </p:clrMapOvr>
+</p:sld>
+</file>
+
+<file path=ppt/slides/slide5.xml><?xml version="1.0" encoding="utf-8"?>
+<p:sld xmlns:a="http://schemas.openxmlformats.org/drawingml/2006/main" xmlns:r="http://schemas.openxmlformats.org/officeDocument/2006/relationships" xmlns:p="http://schemas.openxmlformats.org/presentationml/2006/main">
+  <p:cSld>
+    <p:spTree>
+      <p:nvGrpSpPr>
+        <p:cNvPr id="1" name="">
+          <a:extLst>
+            <a:ext uri="{FF2B5EF4-FFF2-40B4-BE49-F238E27FC236}">
+              <a16:creationId xmlns:a16="http://schemas.microsoft.com/office/drawing/2014/main" id="{784D8F69-B35B-3583-D9C3-FA7BE687552D}"/>
+            </a:ext>
+          </a:extLst>
+        </p:cNvPr>
+        <p:cNvGrpSpPr/>
+        <p:nvPr/>
+      </p:nvGrpSpPr>
+      <p:grpSpPr>
+        <a:xfrm>
+          <a:off x="0" y="0"/>
+          <a:ext cx="0" cy="0"/>
+          <a:chOff x="0" y="0"/>
+          <a:chExt cx="0" cy="0"/>
+        </a:xfrm>
+      </p:grpSpPr>
+      <p:sp>
+        <p:nvSpPr>
+          <p:cNvPr id="5" name="內容版面配置區 4">
+            <a:extLst>
+              <a:ext uri="{FF2B5EF4-FFF2-40B4-BE49-F238E27FC236}">
+                <a16:creationId xmlns:a16="http://schemas.microsoft.com/office/drawing/2014/main" id="{A61252FB-5B37-3DF9-31E1-3DF65DEB29CC}"/>
+              </a:ext>
+            </a:extLst>
+          </p:cNvPr>
+          <p:cNvSpPr>
+            <a:spLocks noGrp="1"/>
+          </p:cNvSpPr>
+          <p:nvPr>
+            <p:ph idx="1"/>
+          </p:nvPr>
+        </p:nvSpPr>
+        <p:spPr>
+          <a:xfrm>
+            <a:off x="0" y="1563639"/>
+            <a:ext cx="9144000" cy="1803647"/>
+          </a:xfrm>
+        </p:spPr>
+        <p:txBody>
+          <a:bodyPr anchor="ctr">
+            <a:normAutofit/>
+          </a:bodyPr>
+          <a:lstStyle/>
+          <a:p>
+            <a:pPr algn="ctr">
+              <a:buNone/>
+            </a:pPr>
+            <a:r>
+              <a:rPr lang="zh-TW" altLang="en-US" sz="4800" b="1" dirty="0">
+                <a:solidFill>
+                  <a:srgbClr val="000066"/>
+                </a:solidFill>
+                <a:latin typeface="微軟正黑體" pitchFamily="34" charset="-120"/>
+                <a:ea typeface="微軟正黑體" pitchFamily="34" charset="-120"/>
+              </a:rPr>
+              <a:t>除祢以外  並沒有</a:t>
+            </a:r>
+            <a:endParaRPr lang="en-US" altLang="zh-TW" sz="4800" b="1" dirty="0">
               <a:solidFill>
                 <a:srgbClr val="000066"/>
               </a:solidFill>
@@ -3320,49 +3700,7 @@
               <a:buNone/>
             </a:pPr>
             <a:r>
-              <a:rPr lang="zh-TW" altLang="en-US" sz="4400" b="1" dirty="0">
-                <a:solidFill>
-                  <a:srgbClr val="000066"/>
-                </a:solidFill>
-                <a:latin typeface="微軟正黑體" pitchFamily="34" charset="-120"/>
-                <a:ea typeface="微軟正黑體" pitchFamily="34" charset="-120"/>
-              </a:rPr>
-              <a:t>除你以外  找不到更美名字</a:t>
-            </a:r>
-            <a:endParaRPr lang="en-US" altLang="zh-TW" sz="4400" b="1" dirty="0">
-              <a:solidFill>
-                <a:srgbClr val="000066"/>
-              </a:solidFill>
-              <a:latin typeface="微軟正黑體" pitchFamily="34" charset="-120"/>
-              <a:ea typeface="微軟正黑體" pitchFamily="34" charset="-120"/>
-            </a:endParaRPr>
-          </a:p>
-          <a:p>
-            <a:pPr algn="ctr">
-              <a:buNone/>
-            </a:pPr>
-            <a:r>
-              <a:rPr lang="zh-TW" altLang="en-US" sz="4400" b="1" dirty="0">
-                <a:solidFill>
-                  <a:srgbClr val="000066"/>
-                </a:solidFill>
-                <a:latin typeface="微軟正黑體" pitchFamily="34" charset="-120"/>
-                <a:ea typeface="微軟正黑體" pitchFamily="34" charset="-120"/>
-              </a:rPr>
-              <a:t>除你以外  並沒有</a:t>
-            </a:r>
-            <a:r>
-              <a:rPr lang="en-US" altLang="zh-TW" sz="4400" b="1" dirty="0">
-                <a:solidFill>
-                  <a:srgbClr val="000066"/>
-                </a:solidFill>
-                <a:latin typeface="微軟正黑體" pitchFamily="34" charset="-120"/>
-                <a:ea typeface="微軟正黑體" pitchFamily="34" charset="-120"/>
-              </a:rPr>
-              <a:t>  </a:t>
-            </a:r>
-            <a:r>
-              <a:rPr lang="zh-TW" altLang="en-US" sz="4400" b="1" dirty="0">
+              <a:rPr lang="zh-TW" altLang="en-US" sz="4800" b="1" dirty="0">
                 <a:solidFill>
                   <a:srgbClr val="000066"/>
                 </a:solidFill>
@@ -3371,20 +3709,146 @@
               </a:rPr>
               <a:t>沒有別名</a:t>
             </a:r>
-            <a:endParaRPr lang="en-US" altLang="zh-TW" sz="4400" b="1" dirty="0">
+          </a:p>
+        </p:txBody>
+      </p:sp>
+      <p:sp>
+        <p:nvSpPr>
+          <p:cNvPr id="3" name="TextBox 2">
+            <a:extLst>
+              <a:ext uri="{FF2B5EF4-FFF2-40B4-BE49-F238E27FC236}">
+                <a16:creationId xmlns:a16="http://schemas.microsoft.com/office/drawing/2014/main" id="{BD2CFF45-FE11-DAFC-01B2-D6A9E1E5F3E2}"/>
+              </a:ext>
+            </a:extLst>
+          </p:cNvPr>
+          <p:cNvSpPr txBox="1"/>
+          <p:nvPr/>
+        </p:nvSpPr>
+        <p:spPr>
+          <a:xfrm>
+            <a:off x="0" y="3867895"/>
+            <a:ext cx="9144000" cy="461665"/>
+          </a:xfrm>
+          <a:prstGeom prst="rect">
+            <a:avLst/>
+          </a:prstGeom>
+          <a:noFill/>
+        </p:spPr>
+        <p:txBody>
+          <a:bodyPr wrap="square" rtlCol="0">
+            <a:spAutoFit/>
+          </a:bodyPr>
+          <a:lstStyle/>
+          <a:p>
+            <a:pPr algn="ctr"/>
+            <a:r>
+              <a:rPr lang="en-US" sz="2400" b="1" dirty="0">
+                <a:solidFill>
+                  <a:srgbClr val="000066"/>
+                </a:solidFill>
+                <a:latin typeface="Microsoft JhengHei" panose="020B0604030504040204" pitchFamily="34" charset="-120"/>
+                <a:ea typeface="Microsoft JhengHei" panose="020B0604030504040204" pitchFamily="34" charset="-120"/>
+              </a:rPr>
+              <a:t>( </a:t>
+            </a:r>
+            <a:r>
+              <a:rPr lang="zh-CN" altLang="en-US" sz="2400" b="1" dirty="0">
+                <a:solidFill>
+                  <a:srgbClr val="000066"/>
+                </a:solidFill>
+                <a:latin typeface="Microsoft JhengHei" panose="020B0604030504040204" pitchFamily="34" charset="-120"/>
+                <a:ea typeface="Microsoft JhengHei" panose="020B0604030504040204" pitchFamily="34" charset="-120"/>
+              </a:rPr>
+              <a:t>副歌</a:t>
+            </a:r>
+            <a:r>
+              <a:rPr lang="en-US" sz="2400" b="1" dirty="0">
+                <a:solidFill>
+                  <a:srgbClr val="000066"/>
+                </a:solidFill>
+                <a:latin typeface="Microsoft JhengHei" panose="020B0604030504040204" pitchFamily="34" charset="-120"/>
+                <a:ea typeface="Microsoft JhengHei" panose="020B0604030504040204" pitchFamily="34" charset="-120"/>
+              </a:rPr>
+              <a:t> )</a:t>
+            </a:r>
+            <a:endParaRPr lang="vi-VN" sz="2400" b="1" dirty="0">
               <a:solidFill>
                 <a:srgbClr val="000066"/>
               </a:solidFill>
-              <a:latin typeface="微軟正黑體" pitchFamily="34" charset="-120"/>
-              <a:ea typeface="微軟正黑體" pitchFamily="34" charset="-120"/>
+              <a:ea typeface="Microsoft JhengHei" panose="020B0604030504040204" pitchFamily="34" charset="-120"/>
             </a:endParaRPr>
           </a:p>
+        </p:txBody>
+      </p:sp>
+    </p:spTree>
+    <p:extLst>
+      <p:ext uri="{BB962C8B-B14F-4D97-AF65-F5344CB8AC3E}">
+        <p14:creationId xmlns:p14="http://schemas.microsoft.com/office/powerpoint/2010/main" val="2561971889"/>
+      </p:ext>
+    </p:extLst>
+  </p:cSld>
+  <p:clrMapOvr>
+    <a:masterClrMapping/>
+  </p:clrMapOvr>
+</p:sld>
+</file>
+
+<file path=ppt/slides/slide6.xml><?xml version="1.0" encoding="utf-8"?>
+<p:sld xmlns:a="http://schemas.openxmlformats.org/drawingml/2006/main" xmlns:r="http://schemas.openxmlformats.org/officeDocument/2006/relationships" xmlns:p="http://schemas.openxmlformats.org/presentationml/2006/main">
+  <p:cSld>
+    <p:spTree>
+      <p:nvGrpSpPr>
+        <p:cNvPr id="1" name="">
+          <a:extLst>
+            <a:ext uri="{FF2B5EF4-FFF2-40B4-BE49-F238E27FC236}">
+              <a16:creationId xmlns:a16="http://schemas.microsoft.com/office/drawing/2014/main" id="{CF147DF8-7431-1293-DC31-1F4EC09A3DD2}"/>
+            </a:ext>
+          </a:extLst>
+        </p:cNvPr>
+        <p:cNvGrpSpPr/>
+        <p:nvPr/>
+      </p:nvGrpSpPr>
+      <p:grpSpPr>
+        <a:xfrm>
+          <a:off x="0" y="0"/>
+          <a:ext cx="0" cy="0"/>
+          <a:chOff x="0" y="0"/>
+          <a:chExt cx="0" cy="0"/>
+        </a:xfrm>
+      </p:grpSpPr>
+      <p:sp>
+        <p:nvSpPr>
+          <p:cNvPr id="5" name="內容版面配置區 4">
+            <a:extLst>
+              <a:ext uri="{FF2B5EF4-FFF2-40B4-BE49-F238E27FC236}">
+                <a16:creationId xmlns:a16="http://schemas.microsoft.com/office/drawing/2014/main" id="{C41790B1-E83F-F24E-1E11-5F95AB831910}"/>
+              </a:ext>
+            </a:extLst>
+          </p:cNvPr>
+          <p:cNvSpPr>
+            <a:spLocks noGrp="1"/>
+          </p:cNvSpPr>
+          <p:nvPr>
+            <p:ph idx="1"/>
+          </p:nvPr>
+        </p:nvSpPr>
+        <p:spPr>
+          <a:xfrm>
+            <a:off x="0" y="1563639"/>
+            <a:ext cx="9144000" cy="1803647"/>
+          </a:xfrm>
+        </p:spPr>
+        <p:txBody>
+          <a:bodyPr anchor="ctr">
+            <a:normAutofit/>
+          </a:bodyPr>
+          <a:lstStyle/>
           <a:p>
             <a:pPr algn="ctr">
               <a:buNone/>
             </a:pPr>
             <a:r>
-              <a:rPr lang="zh-TW" altLang="en-US" sz="4400" b="1" dirty="0">
+              <a:rPr lang="zh-TW" altLang="en-US" sz="4800" b="1" dirty="0">
                 <a:solidFill>
                   <a:srgbClr val="000066"/>
                 </a:solidFill>
@@ -3393,50 +3857,102 @@
               </a:rPr>
               <a:t>可以配受權柄  讚美以及崇敬</a:t>
             </a:r>
-            <a:endParaRPr lang="en-US" altLang="zh-TW" sz="4400" b="1" dirty="0">
+          </a:p>
+          <a:p>
+            <a:pPr algn="ctr">
+              <a:buNone/>
+            </a:pPr>
+            <a:r>
+              <a:rPr lang="zh-TW" altLang="en-US" sz="4800" b="1" dirty="0">
+                <a:solidFill>
+                  <a:srgbClr val="000066"/>
+                </a:solidFill>
+                <a:latin typeface="微軟正黑體" pitchFamily="34" charset="-120"/>
+                <a:ea typeface="微軟正黑體" pitchFamily="34" charset="-120"/>
+              </a:rPr>
+              <a:t>聖潔  國度  榮耀全屬祢</a:t>
+            </a:r>
+          </a:p>
+        </p:txBody>
+      </p:sp>
+      <p:sp>
+        <p:nvSpPr>
+          <p:cNvPr id="3" name="TextBox 2">
+            <a:extLst>
+              <a:ext uri="{FF2B5EF4-FFF2-40B4-BE49-F238E27FC236}">
+                <a16:creationId xmlns:a16="http://schemas.microsoft.com/office/drawing/2014/main" id="{E9F9A2AB-EE26-F738-C409-04F93A83B231}"/>
+              </a:ext>
+            </a:extLst>
+          </p:cNvPr>
+          <p:cNvSpPr txBox="1"/>
+          <p:nvPr/>
+        </p:nvSpPr>
+        <p:spPr>
+          <a:xfrm>
+            <a:off x="0" y="3867895"/>
+            <a:ext cx="9144000" cy="461665"/>
+          </a:xfrm>
+          <a:prstGeom prst="rect">
+            <a:avLst/>
+          </a:prstGeom>
+          <a:noFill/>
+        </p:spPr>
+        <p:txBody>
+          <a:bodyPr wrap="square" rtlCol="0">
+            <a:spAutoFit/>
+          </a:bodyPr>
+          <a:lstStyle/>
+          <a:p>
+            <a:pPr algn="ctr"/>
+            <a:r>
+              <a:rPr lang="en-US" sz="2400" b="1" dirty="0">
+                <a:solidFill>
+                  <a:srgbClr val="000066"/>
+                </a:solidFill>
+                <a:latin typeface="Microsoft JhengHei" panose="020B0604030504040204" pitchFamily="34" charset="-120"/>
+                <a:ea typeface="Microsoft JhengHei" panose="020B0604030504040204" pitchFamily="34" charset="-120"/>
+              </a:rPr>
+              <a:t>( </a:t>
+            </a:r>
+            <a:r>
+              <a:rPr lang="zh-CN" altLang="en-US" sz="2400" b="1" dirty="0">
+                <a:solidFill>
+                  <a:srgbClr val="000066"/>
+                </a:solidFill>
+                <a:latin typeface="Microsoft JhengHei" panose="020B0604030504040204" pitchFamily="34" charset="-120"/>
+                <a:ea typeface="Microsoft JhengHei" panose="020B0604030504040204" pitchFamily="34" charset="-120"/>
+              </a:rPr>
+              <a:t>副歌</a:t>
+            </a:r>
+            <a:r>
+              <a:rPr lang="en-US" sz="2400" b="1" dirty="0">
+                <a:solidFill>
+                  <a:srgbClr val="000066"/>
+                </a:solidFill>
+                <a:latin typeface="Microsoft JhengHei" panose="020B0604030504040204" pitchFamily="34" charset="-120"/>
+                <a:ea typeface="Microsoft JhengHei" panose="020B0604030504040204" pitchFamily="34" charset="-120"/>
+              </a:rPr>
+              <a:t> )</a:t>
+            </a:r>
+            <a:endParaRPr lang="vi-VN" sz="2400" b="1" dirty="0">
               <a:solidFill>
                 <a:srgbClr val="000066"/>
               </a:solidFill>
-              <a:latin typeface="微軟正黑體" pitchFamily="34" charset="-120"/>
-              <a:ea typeface="微軟正黑體" pitchFamily="34" charset="-120"/>
+              <a:ea typeface="Microsoft JhengHei" panose="020B0604030504040204" pitchFamily="34" charset="-120"/>
             </a:endParaRPr>
           </a:p>
-          <a:p>
-            <a:pPr algn="ctr">
-              <a:buNone/>
-            </a:pPr>
-            <a:r>
-              <a:rPr lang="zh-TW" altLang="en-US" sz="4400" b="1" dirty="0">
-                <a:solidFill>
-                  <a:srgbClr val="000066"/>
-                </a:solidFill>
-                <a:latin typeface="微軟正黑體" pitchFamily="34" charset="-120"/>
-                <a:ea typeface="微軟正黑體" pitchFamily="34" charset="-120"/>
-              </a:rPr>
-              <a:t>聖潔  國度  榮耀全屬你</a:t>
-            </a:r>
-            <a:endParaRPr lang="zh-TW" altLang="en-US" sz="4400" b="1" dirty="0">
-              <a:solidFill>
-                <a:srgbClr val="000066"/>
-              </a:solidFill>
-              <a:latin typeface="微軟正黑體" pitchFamily="34" charset="-120"/>
-              <a:ea typeface="微軟正黑體" pitchFamily="34" charset="-120"/>
-            </a:endParaRPr>
-          </a:p>
         </p:txBody>
       </p:sp>
     </p:spTree>
+    <p:extLst>
+      <p:ext uri="{BB962C8B-B14F-4D97-AF65-F5344CB8AC3E}">
+        <p14:creationId xmlns:p14="http://schemas.microsoft.com/office/powerpoint/2010/main" val="4228552428"/>
+      </p:ext>
+    </p:extLst>
   </p:cSld>
   <p:clrMapOvr>
     <a:masterClrMapping/>
   </p:clrMapOvr>
-  <p:timing>
-    <p:tnLst>
-      <p:par>
-        <p:cTn id="1" dur="indefinite" restart="never" nodeType="tmRoot"/>
-      </p:par>
-    </p:tnLst>
-  </p:timing>
 </p:sld>
 </file>
 
